--- a/courseware/DSA_CH07_Graph.pptx
+++ b/courseware/DSA_CH07_Graph.pptx
@@ -3323,7 +3323,7 @@
                 <a:latin typeface="Segoe UI"/>
                 <a:ea typeface="微软雅黑"/>
               </a:rPr>
-              <a:t>现代化重制版讲义　代码按 C++17 重写，全部可编译、可运行</a:t>
+              <a:t>现代化重制版讲义　代码按 C++17 重写；code/ 全部单元双档编译运行通过</a:t>
             </a:r>
           </a:p>
         </p:txBody>
@@ -12399,7 +12399,7 @@
                 <a:latin typeface="Segoe UI"/>
                 <a:ea typeface="微软雅黑"/>
               </a:rPr>
-              <a:t>习题（完整题面与参考答案见同名讲义）</a:t>
+              <a:t>习题选讲</a:t>
             </a:r>
           </a:p>
         </p:txBody>
@@ -12478,11 +12478,11 @@
                 <a:spcPts val="0"/>
               </a:spcBef>
               <a:spcAft>
-                <a:spcPts val="1240"/>
-              </a:spcAft>
-            </a:pPr>
-            <a:r>
-              <a:rPr sz="2000" b="0" i="0">
+                <a:spcPts val="1178"/>
+              </a:spcAft>
+            </a:pPr>
+            <a:r>
+              <a:rPr sz="1900" b="0" i="0">
                 <a:solidFill>
                   <a:srgbClr val="242A33"/>
                 </a:solidFill>
@@ -12492,7 +12492,7 @@
               <a:t>•  </a:t>
             </a:r>
             <a:r>
-              <a:rPr sz="2000" b="1" i="0">
+              <a:rPr sz="1900" b="1" i="0">
                 <a:solidFill>
                   <a:srgbClr val="12395B"/>
                 </a:solidFill>
@@ -12502,7 +12502,7 @@
               <a:t>存储</a:t>
             </a:r>
             <a:r>
-              <a:rPr sz="2000" b="0" i="0">
+              <a:rPr sz="1900" b="0" i="0">
                 <a:solidFill>
                   <a:srgbClr val="242A33"/>
                 </a:solidFill>
@@ -12521,11 +12521,11 @@
                 <a:spcPts val="0"/>
               </a:spcBef>
               <a:spcAft>
-                <a:spcPts val="1240"/>
-              </a:spcAft>
-            </a:pPr>
-            <a:r>
-              <a:rPr sz="2000" b="0" i="0">
+                <a:spcPts val="1178"/>
+              </a:spcAft>
+            </a:pPr>
+            <a:r>
+              <a:rPr sz="1900" b="0" i="0">
                 <a:solidFill>
                   <a:srgbClr val="242A33"/>
                 </a:solidFill>
@@ -12535,7 +12535,7 @@
               <a:t>•  </a:t>
             </a:r>
             <a:r>
-              <a:rPr sz="2000" b="1" i="0">
+              <a:rPr sz="1900" b="1" i="0">
                 <a:solidFill>
                   <a:srgbClr val="12395B"/>
                 </a:solidFill>
@@ -12545,7 +12545,7 @@
               <a:t>周游</a:t>
             </a:r>
             <a:r>
-              <a:rPr sz="2000" b="0" i="0">
+              <a:rPr sz="1900" b="0" i="0">
                 <a:solidFill>
                   <a:srgbClr val="242A33"/>
                 </a:solidFill>
@@ -12555,7 +12555,7 @@
               <a:t>　给定邻接表，写出 DFS 与 BFS 序列；说明</a:t>
             </a:r>
             <a:r>
-              <a:rPr sz="2000" b="1" i="0">
+              <a:rPr sz="1900" b="1" i="0">
                 <a:solidFill>
                   <a:srgbClr val="12395B"/>
                 </a:solidFill>
@@ -12574,11 +12574,11 @@
                 <a:spcPts val="0"/>
               </a:spcBef>
               <a:spcAft>
-                <a:spcPts val="1240"/>
-              </a:spcAft>
-            </a:pPr>
-            <a:r>
-              <a:rPr sz="2000" b="0" i="0">
+                <a:spcPts val="1178"/>
+              </a:spcAft>
+            </a:pPr>
+            <a:r>
+              <a:rPr sz="1900" b="0" i="0">
                 <a:solidFill>
                   <a:srgbClr val="242A33"/>
                 </a:solidFill>
@@ -12588,7 +12588,7 @@
               <a:t>•  </a:t>
             </a:r>
             <a:r>
-              <a:rPr sz="2000" b="1" i="0">
+              <a:rPr sz="1900" b="1" i="0">
                 <a:solidFill>
                   <a:srgbClr val="12395B"/>
                 </a:solidFill>
@@ -12598,7 +12598,7 @@
               <a:t>拓扑</a:t>
             </a:r>
             <a:r>
-              <a:rPr sz="2000" b="0" i="0">
+              <a:rPr sz="1900" b="0" i="0">
                 <a:solidFill>
                   <a:srgbClr val="242A33"/>
                 </a:solidFill>
@@ -12608,7 +12608,7 @@
               <a:t>　对课程先修图给出</a:t>
             </a:r>
             <a:r>
-              <a:rPr sz="2000" b="1" i="0">
+              <a:rPr sz="1900" b="1" i="0">
                 <a:solidFill>
                   <a:srgbClr val="12395B"/>
                 </a:solidFill>
@@ -12618,7 +12618,7 @@
               <a:t>两个不同</a:t>
             </a:r>
             <a:r>
-              <a:rPr sz="2000" b="0" i="0">
+              <a:rPr sz="1900" b="0" i="0">
                 <a:solidFill>
                   <a:srgbClr val="242A33"/>
                 </a:solidFill>
@@ -12637,11 +12637,11 @@
                 <a:spcPts val="0"/>
               </a:spcBef>
               <a:spcAft>
-                <a:spcPts val="1240"/>
-              </a:spcAft>
-            </a:pPr>
-            <a:r>
-              <a:rPr sz="2000" b="0" i="0">
+                <a:spcPts val="1178"/>
+              </a:spcAft>
+            </a:pPr>
+            <a:r>
+              <a:rPr sz="1900" b="0" i="0">
                 <a:solidFill>
                   <a:srgbClr val="242A33"/>
                 </a:solidFill>
@@ -12651,7 +12651,7 @@
               <a:t>•  </a:t>
             </a:r>
             <a:r>
-              <a:rPr sz="2000" b="1" i="0">
+              <a:rPr sz="1900" b="1" i="0">
                 <a:solidFill>
                   <a:srgbClr val="12395B"/>
                 </a:solidFill>
@@ -12661,7 +12661,7 @@
               <a:t>Dijkstra</a:t>
             </a:r>
             <a:r>
-              <a:rPr sz="2000" b="0" i="0">
+              <a:rPr sz="1900" b="0" i="0">
                 <a:solidFill>
                   <a:srgbClr val="242A33"/>
                 </a:solidFill>
@@ -12671,7 +12671,7 @@
               <a:t>　逐轮写出 S 集合与 D 数组；举例说明</a:t>
             </a:r>
             <a:r>
-              <a:rPr sz="2000" b="1" i="0">
+              <a:rPr sz="1900" b="1" i="0">
                 <a:solidFill>
                   <a:srgbClr val="12395B"/>
                 </a:solidFill>
@@ -12690,11 +12690,11 @@
                 <a:spcPts val="0"/>
               </a:spcBef>
               <a:spcAft>
-                <a:spcPts val="1240"/>
-              </a:spcAft>
-            </a:pPr>
-            <a:r>
-              <a:rPr sz="2000" b="0" i="0">
+                <a:spcPts val="1178"/>
+              </a:spcAft>
+            </a:pPr>
+            <a:r>
+              <a:rPr sz="1900" b="0" i="0">
                 <a:solidFill>
                   <a:srgbClr val="242A33"/>
                 </a:solidFill>
@@ -12704,7 +12704,7 @@
               <a:t>•  </a:t>
             </a:r>
             <a:r>
-              <a:rPr sz="2000" b="1" i="0">
+              <a:rPr sz="1900" b="1" i="0">
                 <a:solidFill>
                   <a:srgbClr val="12395B"/>
                 </a:solidFill>
@@ -12714,7 +12714,7 @@
               <a:t>Floyd</a:t>
             </a:r>
             <a:r>
-              <a:rPr sz="2000" b="0" i="0">
+              <a:rPr sz="1900" b="0" i="0">
                 <a:solidFill>
                   <a:srgbClr val="242A33"/>
                 </a:solidFill>
@@ -12733,11 +12733,11 @@
                 <a:spcPts val="0"/>
               </a:spcBef>
               <a:spcAft>
-                <a:spcPts val="1240"/>
-              </a:spcAft>
-            </a:pPr>
-            <a:r>
-              <a:rPr sz="2000" b="0" i="0">
+                <a:spcPts val="1178"/>
+              </a:spcAft>
+            </a:pPr>
+            <a:r>
+              <a:rPr sz="1900" b="0" i="0">
                 <a:solidFill>
                   <a:srgbClr val="242A33"/>
                 </a:solidFill>
@@ -12747,7 +12747,7 @@
               <a:t>•  </a:t>
             </a:r>
             <a:r>
-              <a:rPr sz="2000" b="1" i="0">
+              <a:rPr sz="1900" b="1" i="0">
                 <a:solidFill>
                   <a:srgbClr val="12395B"/>
                 </a:solidFill>
@@ -12757,7 +12757,7 @@
               <a:t>MST</a:t>
             </a:r>
             <a:r>
-              <a:rPr sz="2000" b="0" i="0">
+              <a:rPr sz="1900" b="0" i="0">
                 <a:solidFill>
                   <a:srgbClr val="242A33"/>
                 </a:solidFill>
@@ -12776,11 +12776,11 @@
                 <a:spcPts val="0"/>
               </a:spcBef>
               <a:spcAft>
-                <a:spcPts val="1240"/>
-              </a:spcAft>
-            </a:pPr>
-            <a:r>
-              <a:rPr sz="2000" b="0" i="0">
+                <a:spcPts val="1178"/>
+              </a:spcAft>
+            </a:pPr>
+            <a:r>
+              <a:rPr sz="1900" b="0" i="0">
                 <a:solidFill>
                   <a:srgbClr val="242A33"/>
                 </a:solidFill>
@@ -12790,7 +12790,7 @@
               <a:t>•  </a:t>
             </a:r>
             <a:r>
-              <a:rPr sz="2000" b="1" i="0">
+              <a:rPr sz="1900" b="1" i="0">
                 <a:solidFill>
                   <a:srgbClr val="12395B"/>
                 </a:solidFill>
@@ -12800,7 +12800,7 @@
               <a:t>上机</a:t>
             </a:r>
             <a:r>
-              <a:rPr sz="2000" b="0" i="0">
+              <a:rPr sz="1900" b="0" i="0">
                 <a:solidFill>
                   <a:srgbClr val="242A33"/>
                 </a:solidFill>
@@ -12808,6 +12808,79 @@
                 <a:ea typeface="微软雅黑"/>
               </a:rPr>
               <a:t>　用并查集实现 Kruskal，并与 Prim 的结果对拍</a:t>
+            </a:r>
+          </a:p>
+          <a:p>
+            <a:pPr algn="l">
+              <a:lnSpc>
+                <a:spcPct val="132000"/>
+              </a:lnSpc>
+              <a:spcBef>
+                <a:spcPts val="0"/>
+              </a:spcBef>
+              <a:spcAft>
+                <a:spcPts val="1178"/>
+              </a:spcAft>
+            </a:pPr>
+            <a:r>
+              <a:rPr sz="1900" b="0" i="0">
+                <a:solidFill>
+                  <a:srgbClr val="242A33"/>
+                </a:solidFill>
+                <a:latin typeface="Segoe UI"/>
+                <a:ea typeface="微软雅黑"/>
+              </a:rPr>
+              <a:t>•  </a:t>
+            </a:r>
+            <a:r>
+              <a:rPr sz="1900" b="1" i="0">
+                <a:solidFill>
+                  <a:srgbClr val="12395B"/>
+                </a:solidFill>
+                <a:latin typeface="Segoe UI"/>
+                <a:ea typeface="微软雅黑"/>
+              </a:rPr>
+              <a:t>这一页和讲义里都是选讲。</a:t>
+            </a:r>
+            <a:r>
+              <a:rPr sz="1900" b="0" i="0">
+                <a:solidFill>
+                  <a:srgbClr val="242A33"/>
+                </a:solidFill>
+                <a:latin typeface="Segoe UI"/>
+                <a:ea typeface="微软雅黑"/>
+              </a:rPr>
+              <a:t> 原书全部 </a:t>
+            </a:r>
+            <a:r>
+              <a:rPr sz="1900" b="1" i="0">
+                <a:solidFill>
+                  <a:srgbClr val="12395B"/>
+                </a:solidFill>
+                <a:latin typeface="Segoe UI"/>
+                <a:ea typeface="微软雅黑"/>
+              </a:rPr>
+              <a:t>345 道</a:t>
+            </a:r>
+            <a:r>
+              <a:rPr sz="1900" b="0" i="0">
+                <a:solidFill>
+                  <a:srgbClr val="242A33"/>
+                </a:solidFill>
+                <a:latin typeface="Segoe UI"/>
+                <a:ea typeface="微软雅黑"/>
+              </a:rPr>
+              <a:t>习题与上机题的参考答案，在 </a:t>
+            </a:r>
+            <a:r>
+              <a:rPr sz="1786" b="0" i="0">
+                <a:solidFill>
+                  <a:srgbClr val="242A33"/>
+                </a:solidFill>
+                <a:latin typeface="Consolas"/>
+                <a:ea typeface="Consolas"/>
+              </a:rPr>
+              <a:t>book/习题与参考答案.md</a:t>
             </a:r>
           </a:p>
         </p:txBody>
